--- a/Apresentações/06 - Estruturas condicionais.pptx
+++ b/Apresentações/06 - Estruturas condicionais.pptx
@@ -16258,14 +16258,14 @@
           <a:p>
             <a:pPr algn="just"/>
             <a:r>
-              <a:rPr lang="pt-BR" altLang="pt-BR" sz="1600">
+              <a:rPr lang="pt-BR" altLang="pt-BR" sz="1600" dirty="0">
                 <a:latin typeface="Verdana" panose="020B0604030504040204" pitchFamily="34" charset="0"/>
                 <a:cs typeface="Times New Roman" panose="02020603050405020304" pitchFamily="18" charset="0"/>
               </a:rPr>
               <a:t>O </a:t>
             </a:r>
             <a:r>
-              <a:rPr lang="pt-BR" altLang="pt-BR" sz="1600" b="1" i="1" err="1">
+              <a:rPr lang="pt-BR" altLang="pt-BR" sz="1600" b="1" i="1" dirty="0" err="1">
                 <a:solidFill>
                   <a:srgbClr val="002060"/>
                 </a:solidFill>
@@ -16275,7 +16275,7 @@
               <a:t>elif</a:t>
             </a:r>
             <a:r>
-              <a:rPr lang="pt-BR" altLang="pt-BR" sz="1600" b="1" i="1">
+              <a:rPr lang="pt-BR" altLang="pt-BR" sz="1600" b="1" i="1" dirty="0">
                 <a:solidFill>
                   <a:srgbClr val="002060"/>
                 </a:solidFill>
@@ -16285,7 +16285,7 @@
               <a:t> </a:t>
             </a:r>
             <a:r>
-              <a:rPr lang="pt-BR" altLang="pt-BR" sz="1600" i="1">
+              <a:rPr lang="pt-BR" altLang="pt-BR" sz="1600" i="1" dirty="0">
                 <a:solidFill>
                   <a:srgbClr val="002060"/>
                 </a:solidFill>
@@ -16295,7 +16295,7 @@
               <a:t>funciona com </a:t>
             </a:r>
             <a:r>
-              <a:rPr lang="pt-BR" altLang="pt-BR" sz="1600" b="1" i="1" err="1">
+              <a:rPr lang="pt-BR" altLang="pt-BR" sz="1600" b="1" i="1" dirty="0" err="1">
                 <a:solidFill>
                   <a:srgbClr val="002060"/>
                 </a:solidFill>
@@ -16305,7 +16305,7 @@
               <a:t>else</a:t>
             </a:r>
             <a:r>
-              <a:rPr lang="pt-BR" altLang="pt-BR" sz="1600" b="1" i="1">
+              <a:rPr lang="pt-BR" altLang="pt-BR" sz="1600" b="1" i="1" dirty="0">
                 <a:solidFill>
                   <a:srgbClr val="002060"/>
                 </a:solidFill>
@@ -16315,7 +16315,7 @@
               <a:t> </a:t>
             </a:r>
             <a:r>
-              <a:rPr lang="pt-BR" altLang="pt-BR" sz="1600" b="1" i="1" err="1">
+              <a:rPr lang="pt-BR" altLang="pt-BR" sz="1600" b="1" i="1" dirty="0" err="1">
                 <a:solidFill>
                   <a:srgbClr val="002060"/>
                 </a:solidFill>
@@ -16325,7 +16325,7 @@
               <a:t>if</a:t>
             </a:r>
             <a:r>
-              <a:rPr lang="pt-BR" altLang="pt-BR" sz="1600" b="1" i="1">
+              <a:rPr lang="pt-BR" altLang="pt-BR" sz="1600" b="1" i="1" dirty="0">
                 <a:solidFill>
                   <a:srgbClr val="002060"/>
                 </a:solidFill>
@@ -16335,14 +16335,14 @@
               <a:t> </a:t>
             </a:r>
             <a:r>
-              <a:rPr lang="pt-BR" altLang="pt-BR" sz="1600">
+              <a:rPr lang="pt-BR" altLang="pt-BR" sz="1600" dirty="0">
                 <a:latin typeface="Verdana" panose="020B0604030504040204" pitchFamily="34" charset="0"/>
                 <a:cs typeface="Times New Roman" panose="02020603050405020304" pitchFamily="18" charset="0"/>
               </a:rPr>
               <a:t>(se não se) , veja no exemplo abaixo:</a:t>
             </a:r>
             <a:r>
-              <a:rPr lang="pt-BR" altLang="pt-BR" sz="1600" b="1">
+              <a:rPr lang="pt-BR" altLang="pt-BR" sz="1600" b="1" dirty="0">
                 <a:solidFill>
                   <a:srgbClr val="002060"/>
                 </a:solidFill>
@@ -16353,14 +16353,14 @@
             </a:r>
           </a:p>
           <a:p>
-            <a:endParaRPr lang="en-US" altLang="pt-BR" sz="1600">
+            <a:endParaRPr lang="en-US" altLang="pt-BR" sz="1600" dirty="0">
               <a:latin typeface="Verdana" panose="020B0604030504040204" pitchFamily="34" charset="0"/>
               <a:cs typeface="Times New Roman" panose="02020603050405020304" pitchFamily="18" charset="0"/>
             </a:endParaRPr>
           </a:p>
           <a:p>
             <a:r>
-              <a:rPr lang="pt-BR" altLang="pt-BR" sz="1600">
+              <a:rPr lang="pt-BR" altLang="pt-BR" sz="1600" dirty="0">
                 <a:latin typeface="Verdana" panose="020B0604030504040204" pitchFamily="34" charset="0"/>
                 <a:cs typeface="Times New Roman" panose="02020603050405020304" pitchFamily="18" charset="0"/>
               </a:rPr>
@@ -17215,7 +17215,7 @@
                 <a:latin typeface="Verdana" panose="020B0604030504040204" pitchFamily="34" charset="0"/>
                 <a:cs typeface="Times New Roman" panose="02020603050405020304" pitchFamily="18" charset="0"/>
               </a:rPr>
-              <a:t>Operador = input(‘Digite a operação desejada: ‘)</a:t>
+              <a:t>operador = input(‘Digite a operação desejada: ‘)</a:t>
             </a:r>
           </a:p>
           <a:p>
@@ -19715,18 +19715,11 @@
           <a:p>
             <a:pPr algn="just"/>
             <a:r>
-              <a:rPr lang="pt-BR" sz="2000" b="0" i="0" dirty="0" err="1">
-                <a:effectLst/>
-                <a:latin typeface="inherit"/>
-              </a:rPr>
-              <a:t>variavel</a:t>
-            </a:r>
-            <a:r>
               <a:rPr lang="pt-BR" sz="2000" b="0" i="0" dirty="0">
                 <a:effectLst/>
                 <a:latin typeface="inherit"/>
               </a:rPr>
-              <a:t> = 123</a:t>
+              <a:t>x = 123</a:t>
             </a:r>
             <a:r>
               <a:rPr lang="pt-BR" sz="2000" b="0" i="0" dirty="0">
@@ -19746,11 +19739,10 @@
               <a:t>match </a:t>
             </a:r>
             <a:r>
-              <a:rPr lang="pt-BR" sz="2000" b="0" i="0" dirty="0" err="1">
-                <a:effectLst/>
+              <a:rPr lang="pt-BR" sz="2000" dirty="0">
                 <a:latin typeface="inherit"/>
               </a:rPr>
-              <a:t>variavel</a:t>
+              <a:t>x</a:t>
             </a:r>
             <a:r>
               <a:rPr lang="pt-BR" sz="2000" b="0" i="0" dirty="0">
@@ -29142,8 +29134,8 @@
           </a:graphicData>
         </a:graphic>
       </p:graphicFrame>
-      <mc:AlternateContent xmlns:mc="http://schemas.openxmlformats.org/markup-compatibility/2006" xmlns:a14="http://schemas.microsoft.com/office/drawing/2010/main">
-        <mc:Choice Requires="a14">
+      <mc:AlternateContent xmlns:mc="http://schemas.openxmlformats.org/markup-compatibility/2006">
+        <mc:Choice xmlns:a14="http://schemas.microsoft.com/office/drawing/2010/main" Requires="a14">
           <p:graphicFrame>
             <p:nvGraphicFramePr>
               <p:cNvPr id="9" name="Tabela 2">
@@ -29156,10 +29148,16 @@
               <p:cNvGraphicFramePr>
                 <a:graphicFrameLocks noGrp="1"/>
               </p:cNvGraphicFramePr>
-              <p:nvPr/>
+              <p:nvPr>
+                <p:extLst>
+                  <p:ext uri="{D42A27DB-BD31-4B8C-83A1-F6EECF244321}">
+                    <p14:modId xmlns:p14="http://schemas.microsoft.com/office/powerpoint/2010/main" val="486370609"/>
+                  </p:ext>
+                </p:extLst>
+              </p:nvPr>
             </p:nvGraphicFramePr>
             <p:xfrm>
-              <a:off x="3812316" y="1893569"/>
+              <a:off x="3834619" y="2274073"/>
               <a:ext cx="4874484" cy="2334468"/>
             </p:xfrm>
             <a:graphic>
@@ -29191,7 +29189,7 @@
                       </a:extLst>
                     </a:gridCol>
                   </a:tblGrid>
-                  <a:tr h="268606">
+                  <a:tr h="0">
                     <a:tc>
                       <a:txBody>
                         <a:bodyPr/>
@@ -29484,23 +29482,23 @@
                         <a:lstStyle/>
                         <a:p>
                           <a:r>
-                            <a:rPr lang="pt-BR" sz="1200" b="0" i="1">
+                            <a:rPr lang="pt-BR" sz="1200" b="0" i="1" dirty="0">
                               <a:latin typeface="+mn-lt"/>
                             </a:rPr>
                             <a:t>Baseado no valor do saldo médio informado verificar na tabela qual o percentual de crédito que será fornecido e atribuir a variável </a:t>
                           </a:r>
                           <a:r>
-                            <a:rPr lang="pt-BR" sz="1200" b="0" i="1" err="1">
+                            <a:rPr lang="pt-BR" sz="1200" b="0" i="1" dirty="0" err="1">
                               <a:latin typeface="+mn-lt"/>
                             </a:rPr>
                             <a:t>perc_Credito</a:t>
                           </a:r>
-                          <a:endParaRPr lang="pt-BR" sz="1200" b="0" i="1">
+                          <a:endParaRPr lang="pt-BR" sz="1200" b="0" i="1" dirty="0">
                             <a:latin typeface="+mn-lt"/>
                           </a:endParaRPr>
                         </a:p>
                         <a:p>
-                          <a:endParaRPr lang="pt-BR" sz="1200" b="0" i="1">
+                          <a:endParaRPr lang="pt-BR" sz="1200" b="0" i="1" dirty="0">
                             <a:latin typeface="+mn-lt"/>
                           </a:endParaRPr>
                         </a:p>
@@ -29632,7 +29630,7 @@
                               </m:oMath>
                             </m:oMathPara>
                           </a14:m>
-                          <a:endParaRPr lang="pt-BR" sz="1200" b="0" i="1">
+                          <a:endParaRPr lang="pt-BR" sz="1200" b="0" i="1" dirty="0">
                             <a:latin typeface="+mn-lt"/>
                           </a:endParaRPr>
                         </a:p>
@@ -29664,7 +29662,7 @@
             </a:graphic>
           </p:graphicFrame>
         </mc:Choice>
-        <mc:Fallback xmlns="">
+        <mc:Fallback>
           <p:graphicFrame>
             <p:nvGraphicFramePr>
               <p:cNvPr id="9" name="Tabela 2">
@@ -29677,10 +29675,16 @@
               <p:cNvGraphicFramePr>
                 <a:graphicFrameLocks noGrp="1"/>
               </p:cNvGraphicFramePr>
-              <p:nvPr/>
+              <p:nvPr>
+                <p:extLst>
+                  <p:ext uri="{D42A27DB-BD31-4B8C-83A1-F6EECF244321}">
+                    <p14:modId xmlns:p14="http://schemas.microsoft.com/office/powerpoint/2010/main" val="486370609"/>
+                  </p:ext>
+                </p:extLst>
+              </p:nvPr>
             </p:nvGraphicFramePr>
             <p:xfrm>
-              <a:off x="3812316" y="1893569"/>
+              <a:off x="3834619" y="2274073"/>
               <a:ext cx="4874484" cy="2334468"/>
             </p:xfrm>
             <a:graphic>
@@ -30011,7 +30015,7 @@
                         <a:blipFill>
                           <a:blip r:embed="rId3"/>
                           <a:stretch>
-                            <a:fillRect l="-625" t="-97462" r="-1875" b="-7107"/>
+                            <a:fillRect l="-625" t="-97959" r="-1750" b="-7653"/>
                           </a:stretch>
                         </a:blipFill>
                       </a:tcPr>
@@ -30059,7 +30063,7 @@
         </p:blipFill>
         <p:spPr bwMode="auto">
           <a:xfrm>
-            <a:off x="5953125" y="409514"/>
+            <a:off x="5953125" y="924278"/>
             <a:ext cx="3048000" cy="1086505"/>
           </a:xfrm>
           <a:prstGeom prst="rect">
